--- a/docs/Radiografía Steam.pptx
+++ b/docs/Radiografía Steam.pptx
@@ -1151,17 +1151,6 @@
             <a:pPr marL="0" indent="0">
               <a:buNone/>
             </a:pPr>
-            <a:r>
-              <a:rPr lang="en-US" sz="1200" b="1" kern="0" spc="200" dirty="0">
-                <a:solidFill>
-                  <a:srgbClr val="66C0F4"/>
-                </a:solidFill>
-                <a:latin typeface="Calibri" pitchFamily="34" charset="0"/>
-                <a:ea typeface="Calibri" pitchFamily="34" charset="-122"/>
-                <a:cs typeface="Calibri" pitchFamily="34" charset="-120"/>
-              </a:rPr>
-              <a:t>EIN092B VISUALIZACIÓN · PROYECTO 2026-II · AVANCE 1</a:t>
-            </a:r>
             <a:endParaRPr lang="en-US" sz="1200" dirty="0"/>
           </a:p>
         </p:txBody>
@@ -2509,28 +2498,6 @@
       </p:sp>
       <p:sp>
         <p:nvSpPr>
-          <p:cNvPr id="29" name="Shape 21"/>
-          <p:cNvSpPr/>
-          <p:nvPr/>
-        </p:nvSpPr>
-        <p:spPr>
-          <a:xfrm>
-            <a:off x="8156448" y="4434840"/>
-            <a:ext cx="3483864" cy="1325880"/>
-          </a:xfrm>
-          <a:prstGeom prst="roundRect">
-            <a:avLst>
-              <a:gd name="adj" fmla="val 5517"/>
-            </a:avLst>
-          </a:prstGeom>
-          <a:solidFill>
-            <a:srgbClr val="1B2838"/>
-          </a:solidFill>
-          <a:ln/>
-        </p:spPr>
-      </p:sp>
-      <p:sp>
-        <p:nvSpPr>
           <p:cNvPr id="30" name="Text 22"/>
           <p:cNvSpPr txBox="1"/>
           <p:nvPr/>
@@ -2553,17 +2520,6 @@
             <a:pPr marL="0" indent="0">
               <a:buNone/>
             </a:pPr>
-            <a:r>
-              <a:rPr lang="en-US" sz="1100" b="1" dirty="0">
-                <a:solidFill>
-                  <a:srgbClr val="66C0F4"/>
-                </a:solidFill>
-                <a:latin typeface="Calibri" pitchFamily="34" charset="0"/>
-                <a:ea typeface="Calibri" pitchFamily="34" charset="-122"/>
-                <a:cs typeface="Calibri" pitchFamily="34" charset="-120"/>
-              </a:rPr>
-              <a:t>Un buen alcance es:</a:t>
-            </a:r>
             <a:endParaRPr lang="en-US" sz="1100" dirty="0"/>
           </a:p>
         </p:txBody>
@@ -5190,17 +5146,6 @@
             <a:pPr marL="0" indent="0">
               <a:buNone/>
             </a:pPr>
-            <a:r>
-              <a:rPr lang="en-US" sz="1050" i="1" dirty="0">
-                <a:solidFill>
-                  <a:srgbClr val="5B6B7A"/>
-                </a:solidFill>
-                <a:latin typeface="Calibri" pitchFamily="34" charset="0"/>
-                <a:ea typeface="Calibri" pitchFamily="34" charset="-122"/>
-                <a:cs typeface="Calibri" pitchFamily="34" charset="-120"/>
-              </a:rPr>
-              <a:t>Los valores son ilustrativos del formato, no corresponden a un juego específico.</a:t>
-            </a:r>
             <a:endParaRPr lang="en-US" sz="1050" dirty="0"/>
           </a:p>
         </p:txBody>
@@ -6178,17 +6123,6 @@
             <a:pPr marL="0" indent="0">
               <a:buNone/>
             </a:pPr>
-            <a:r>
-              <a:rPr lang="en-US" sz="1200" b="1" kern="0" spc="200" dirty="0">
-                <a:solidFill>
-                  <a:srgbClr val="66C0F4"/>
-                </a:solidFill>
-                <a:latin typeface="Calibri" pitchFamily="34" charset="0"/>
-                <a:ea typeface="Calibri" pitchFamily="34" charset="-122"/>
-                <a:cs typeface="Calibri" pitchFamily="34" charset="-120"/>
-              </a:rPr>
-              <a:t>AVANCE 1 · ORGANIZACIÓN</a:t>
-            </a:r>
             <a:endParaRPr lang="en-US" sz="1200" dirty="0"/>
           </a:p>
         </p:txBody>
@@ -6892,74 +6826,13 @@
       </p:sp>
       <p:sp>
         <p:nvSpPr>
-          <p:cNvPr id="19" name="Shape 11"/>
-          <p:cNvSpPr/>
-          <p:nvPr/>
-        </p:nvSpPr>
-        <p:spPr>
-          <a:xfrm>
-            <a:off x="6400800" y="4709160"/>
-            <a:ext cx="5239512" cy="640080"/>
-          </a:xfrm>
-          <a:prstGeom prst="roundRect">
-            <a:avLst>
-              <a:gd name="adj" fmla="val 11429"/>
-            </a:avLst>
-          </a:prstGeom>
-          <a:solidFill>
-            <a:srgbClr val="66C0F4"/>
-          </a:solidFill>
-          <a:ln/>
-        </p:spPr>
-      </p:sp>
-      <p:sp>
-        <p:nvSpPr>
-          <p:cNvPr id="20" name="Text 12"/>
-          <p:cNvSpPr txBox="1"/>
-          <p:nvPr/>
-        </p:nvSpPr>
-        <p:spPr>
-          <a:xfrm>
-            <a:off x="6400800" y="4709160"/>
-            <a:ext cx="5239512" cy="640080"/>
-          </a:xfrm>
-          <a:prstGeom prst="rect">
-            <a:avLst/>
-          </a:prstGeom>
-          <a:noFill/>
-          <a:ln/>
-        </p:spPr>
-        <p:txBody>
-          <a:bodyPr wrap="square" lIns="0" tIns="0" rIns="0" bIns="0" rtlCol="0" anchor="ctr"/>
-          <a:lstStyle/>
-          <a:p>
-            <a:pPr marL="0" indent="0" algn="ctr">
-              <a:buNone/>
-            </a:pPr>
-            <a:r>
-              <a:rPr lang="en-US" sz="1500" b="1" dirty="0">
-                <a:solidFill>
-                  <a:srgbClr val="1B2838"/>
-                </a:solidFill>
-                <a:latin typeface="Calibri" pitchFamily="34" charset="0"/>
-                <a:ea typeface="Calibri" pitchFamily="34" charset="-122"/>
-                <a:cs typeface="Calibri" pitchFamily="34" charset="-120"/>
-              </a:rPr>
-              <a:t>ordenada + documentada + reproducible</a:t>
-            </a:r>
-            <a:endParaRPr lang="en-US" sz="1500" dirty="0"/>
-          </a:p>
-        </p:txBody>
-      </p:sp>
-      <p:sp>
-        <p:nvSpPr>
           <p:cNvPr id="21" name="Text 13"/>
           <p:cNvSpPr txBox="1"/>
           <p:nvPr/>
         </p:nvSpPr>
         <p:spPr>
           <a:xfrm>
-            <a:off x="6400800" y="5532120"/>
+            <a:off x="6400800" y="4579651"/>
             <a:ext cx="5239512" cy="457200"/>
           </a:xfrm>
           <a:prstGeom prst="rect">
@@ -6975,17 +6848,6 @@
             <a:pPr marL="0" indent="0">
               <a:buNone/>
             </a:pPr>
-            <a:r>
-              <a:rPr lang="en-US" sz="1100" i="1" dirty="0">
-                <a:solidFill>
-                  <a:srgbClr val="8CA0B3"/>
-                </a:solidFill>
-                <a:latin typeface="Calibri" pitchFamily="34" charset="0"/>
-                <a:ea typeface="Calibri" pitchFamily="34" charset="-122"/>
-                <a:cs typeface="Calibri" pitchFamily="34" charset="-120"/>
-              </a:rPr>
-              <a:t>Los datos no se versionan por peso; el README indica cómo obtenerlos.</a:t>
-            </a:r>
             <a:endParaRPr lang="en-US" sz="1100" dirty="0"/>
           </a:p>
         </p:txBody>

--- a/docs/Radiografía Steam.pptx
+++ b/docs/Radiografía Steam.pptx
@@ -1970,13 +1970,72 @@
       </p:sp>
       <p:sp>
         <p:nvSpPr>
-          <p:cNvPr id="13" name="Shape 9"/>
+          <p:cNvPr id="15" name="Text 10"/>
+          <p:cNvSpPr txBox="1"/>
+          <p:nvPr/>
+        </p:nvSpPr>
+        <p:spPr>
+          <a:xfrm>
+            <a:off x="4581144" y="3584448"/>
+            <a:ext cx="3026664" cy="274320"/>
+          </a:xfrm>
+          <a:prstGeom prst="rect">
+            <a:avLst/>
+          </a:prstGeom>
+          <a:noFill/>
+          <a:ln/>
+        </p:spPr>
+        <p:txBody>
+          <a:bodyPr wrap="square" lIns="0" tIns="0" rIns="0" bIns="0" rtlCol="0" anchor="ctr"/>
+          <a:lstStyle/>
+          <a:p>
+            <a:pPr marL="0" indent="0">
+              <a:buNone/>
+            </a:pPr>
+            <a:endParaRPr lang="en-US" sz="1300" dirty="0"/>
+          </a:p>
+        </p:txBody>
+      </p:sp>
+      <p:sp>
+        <p:nvSpPr>
+          <p:cNvPr id="16" name="Text 11"/>
+          <p:cNvSpPr txBox="1"/>
+          <p:nvPr/>
+        </p:nvSpPr>
+        <p:spPr>
+          <a:xfrm>
+            <a:off x="4581144" y="3858768"/>
+            <a:ext cx="3026664" cy="320040"/>
+          </a:xfrm>
+          <a:prstGeom prst="rect">
+            <a:avLst/>
+          </a:prstGeom>
+          <a:noFill/>
+          <a:ln/>
+        </p:spPr>
+        <p:txBody>
+          <a:bodyPr wrap="square" lIns="0" tIns="0" rIns="0" bIns="0" rtlCol="0" anchor="ctr"/>
+          <a:lstStyle/>
+          <a:p>
+            <a:pPr marL="0" indent="0">
+              <a:lnSpc>
+                <a:spcPct val="98000"/>
+              </a:lnSpc>
+              <a:buNone/>
+            </a:pPr>
+            <a:endParaRPr lang="en-US" sz="1100" dirty="0"/>
+          </a:p>
+        </p:txBody>
+      </p:sp>
+      <p:sp>
+        <p:nvSpPr>
+          <p:cNvPr id="17" name="Shape 12"/>
           <p:cNvSpPr/>
           <p:nvPr/>
         </p:nvSpPr>
         <p:spPr>
           <a:xfrm>
-            <a:off x="4352544" y="2926080"/>
+            <a:off x="8156448" y="2926080"/>
             <a:ext cx="3483864" cy="1325880"/>
           </a:xfrm>
           <a:prstGeom prst="roundRect">
@@ -1997,7 +2056,7 @@
       </p:sp>
       <p:pic>
         <p:nvPicPr>
-          <p:cNvPr id="14" name="Image 2" descr="preencoded.png"/>
+          <p:cNvPr id="18" name="Image 3" descr="preencoded.png"/>
           <p:cNvPicPr>
             <a:picLocks noChangeAspect="1"/>
           </p:cNvPicPr>
@@ -2011,7 +2070,7 @@
         </p:blipFill>
         <p:spPr>
           <a:xfrm>
-            <a:off x="4581144" y="3154680"/>
+            <a:off x="8385048" y="3154680"/>
             <a:ext cx="411480" cy="411480"/>
           </a:xfrm>
           <a:prstGeom prst="rect">
@@ -2021,13 +2080,13 @@
       </p:pic>
       <p:sp>
         <p:nvSpPr>
-          <p:cNvPr id="15" name="Text 10"/>
+          <p:cNvPr id="19" name="Text 13"/>
           <p:cNvSpPr txBox="1"/>
           <p:nvPr/>
         </p:nvSpPr>
         <p:spPr>
           <a:xfrm>
-            <a:off x="4581144" y="3584448"/>
+            <a:off x="8385048" y="3584448"/>
             <a:ext cx="3026664" cy="274320"/>
           </a:xfrm>
           <a:prstGeom prst="rect">
@@ -2052,7 +2111,7 @@
                 <a:ea typeface="Calibri" pitchFamily="34" charset="-122"/>
                 <a:cs typeface="Calibri" pitchFamily="34" charset="-120"/>
               </a:rPr>
-              <a:t>Unidad de observación</a:t>
+              <a:t>Población y contexto</a:t>
             </a:r>
             <a:endParaRPr lang="en-US" sz="1300" dirty="0"/>
           </a:p>
@@ -2060,13 +2119,13 @@
       </p:sp>
       <p:sp>
         <p:nvSpPr>
-          <p:cNvPr id="16" name="Text 11"/>
+          <p:cNvPr id="20" name="Text 14"/>
           <p:cNvSpPr txBox="1"/>
           <p:nvPr/>
         </p:nvSpPr>
         <p:spPr>
           <a:xfrm>
-            <a:off x="4581144" y="3858768"/>
+            <a:off x="8385048" y="3858768"/>
             <a:ext cx="3026664" cy="320040"/>
           </a:xfrm>
           <a:prstGeom prst="rect">
@@ -2094,7 +2153,7 @@
                 <a:ea typeface="Calibri" pitchFamily="34" charset="-122"/>
                 <a:cs typeface="Calibri" pitchFamily="34" charset="-120"/>
               </a:rPr>
-              <a:t>Un juego publicado (un AppID)</a:t>
+              <a:t>Catálogo de Steam, con umbral mínimo de reseñas</a:t>
             </a:r>
             <a:endParaRPr lang="en-US" sz="1100" dirty="0"/>
           </a:p>
@@ -2102,13 +2161,13 @@
       </p:sp>
       <p:sp>
         <p:nvSpPr>
-          <p:cNvPr id="17" name="Shape 12"/>
+          <p:cNvPr id="21" name="Shape 15"/>
           <p:cNvSpPr/>
           <p:nvPr/>
         </p:nvSpPr>
         <p:spPr>
           <a:xfrm>
-            <a:off x="8156448" y="2926080"/>
+            <a:off x="2286000" y="4434840"/>
             <a:ext cx="3483864" cy="1325880"/>
           </a:xfrm>
           <a:prstGeom prst="roundRect">
@@ -2129,7 +2188,7 @@
       </p:sp>
       <p:pic>
         <p:nvPicPr>
-          <p:cNvPr id="18" name="Image 3" descr="preencoded.png"/>
+          <p:cNvPr id="22" name="Image 4" descr="preencoded.png"/>
           <p:cNvPicPr>
             <a:picLocks noChangeAspect="1"/>
           </p:cNvPicPr>
@@ -2143,7 +2202,7 @@
         </p:blipFill>
         <p:spPr>
           <a:xfrm>
-            <a:off x="8385048" y="3154680"/>
+            <a:off x="2514600" y="4663440"/>
             <a:ext cx="411480" cy="411480"/>
           </a:xfrm>
           <a:prstGeom prst="rect">
@@ -2153,13 +2212,13 @@
       </p:pic>
       <p:sp>
         <p:nvSpPr>
-          <p:cNvPr id="19" name="Text 13"/>
+          <p:cNvPr id="23" name="Text 16"/>
           <p:cNvSpPr txBox="1"/>
           <p:nvPr/>
         </p:nvSpPr>
         <p:spPr>
           <a:xfrm>
-            <a:off x="8385048" y="3584448"/>
+            <a:off x="2514600" y="5093208"/>
             <a:ext cx="3026664" cy="274320"/>
           </a:xfrm>
           <a:prstGeom prst="rect">
@@ -2184,7 +2243,7 @@
                 <a:ea typeface="Calibri" pitchFamily="34" charset="-122"/>
                 <a:cs typeface="Calibri" pitchFamily="34" charset="-120"/>
               </a:rPr>
-              <a:t>Población y contexto</a:t>
+              <a:t>Periodo</a:t>
             </a:r>
             <a:endParaRPr lang="en-US" sz="1300" dirty="0"/>
           </a:p>
@@ -2192,13 +2251,13 @@
       </p:sp>
       <p:sp>
         <p:nvSpPr>
-          <p:cNvPr id="20" name="Text 14"/>
+          <p:cNvPr id="24" name="Text 17"/>
           <p:cNvSpPr txBox="1"/>
           <p:nvPr/>
         </p:nvSpPr>
         <p:spPr>
           <a:xfrm>
-            <a:off x="8385048" y="3858768"/>
+            <a:off x="2514600" y="5367528"/>
             <a:ext cx="3026664" cy="320040"/>
           </a:xfrm>
           <a:prstGeom prst="rect">
@@ -2226,7 +2285,7 @@
                 <a:ea typeface="Calibri" pitchFamily="34" charset="-122"/>
                 <a:cs typeface="Calibri" pitchFamily="34" charset="-120"/>
               </a:rPr>
-              <a:t>Catálogo de Steam, con umbral mínimo de reseñas</a:t>
+              <a:t>Títulos publicados entre 2014 y 2024</a:t>
             </a:r>
             <a:endParaRPr lang="en-US" sz="1100" dirty="0"/>
           </a:p>
@@ -2234,13 +2293,13 @@
       </p:sp>
       <p:sp>
         <p:nvSpPr>
-          <p:cNvPr id="21" name="Shape 15"/>
+          <p:cNvPr id="25" name="Shape 18"/>
           <p:cNvSpPr/>
           <p:nvPr/>
         </p:nvSpPr>
         <p:spPr>
           <a:xfrm>
-            <a:off x="548640" y="4434840"/>
+            <a:off x="6643116" y="4430268"/>
             <a:ext cx="3483864" cy="1325880"/>
           </a:xfrm>
           <a:prstGeom prst="roundRect">
@@ -2261,7 +2320,7 @@
       </p:sp>
       <p:pic>
         <p:nvPicPr>
-          <p:cNvPr id="22" name="Image 4" descr="preencoded.png"/>
+          <p:cNvPr id="26" name="Image 5" descr="preencoded.png"/>
           <p:cNvPicPr>
             <a:picLocks noChangeAspect="1"/>
           </p:cNvPicPr>
@@ -2275,139 +2334,7 @@
         </p:blipFill>
         <p:spPr>
           <a:xfrm>
-            <a:off x="777240" y="4663440"/>
-            <a:ext cx="411480" cy="411480"/>
-          </a:xfrm>
-          <a:prstGeom prst="rect">
-            <a:avLst/>
-          </a:prstGeom>
-        </p:spPr>
-      </p:pic>
-      <p:sp>
-        <p:nvSpPr>
-          <p:cNvPr id="23" name="Text 16"/>
-          <p:cNvSpPr txBox="1"/>
-          <p:nvPr/>
-        </p:nvSpPr>
-        <p:spPr>
-          <a:xfrm>
-            <a:off x="777240" y="5093208"/>
-            <a:ext cx="3026664" cy="274320"/>
-          </a:xfrm>
-          <a:prstGeom prst="rect">
-            <a:avLst/>
-          </a:prstGeom>
-          <a:noFill/>
-          <a:ln/>
-        </p:spPr>
-        <p:txBody>
-          <a:bodyPr wrap="square" lIns="0" tIns="0" rIns="0" bIns="0" rtlCol="0" anchor="ctr"/>
-          <a:lstStyle/>
-          <a:p>
-            <a:pPr marL="0" indent="0">
-              <a:buNone/>
-            </a:pPr>
-            <a:r>
-              <a:rPr lang="en-US" sz="1300" b="1" dirty="0">
-                <a:solidFill>
-                  <a:srgbClr val="1B2838"/>
-                </a:solidFill>
-                <a:latin typeface="Calibri" pitchFamily="34" charset="0"/>
-                <a:ea typeface="Calibri" pitchFamily="34" charset="-122"/>
-                <a:cs typeface="Calibri" pitchFamily="34" charset="-120"/>
-              </a:rPr>
-              <a:t>Periodo</a:t>
-            </a:r>
-            <a:endParaRPr lang="en-US" sz="1300" dirty="0"/>
-          </a:p>
-        </p:txBody>
-      </p:sp>
-      <p:sp>
-        <p:nvSpPr>
-          <p:cNvPr id="24" name="Text 17"/>
-          <p:cNvSpPr txBox="1"/>
-          <p:nvPr/>
-        </p:nvSpPr>
-        <p:spPr>
-          <a:xfrm>
-            <a:off x="777240" y="5367528"/>
-            <a:ext cx="3026664" cy="320040"/>
-          </a:xfrm>
-          <a:prstGeom prst="rect">
-            <a:avLst/>
-          </a:prstGeom>
-          <a:noFill/>
-          <a:ln/>
-        </p:spPr>
-        <p:txBody>
-          <a:bodyPr wrap="square" lIns="0" tIns="0" rIns="0" bIns="0" rtlCol="0" anchor="ctr"/>
-          <a:lstStyle/>
-          <a:p>
-            <a:pPr marL="0" indent="0">
-              <a:lnSpc>
-                <a:spcPct val="98000"/>
-              </a:lnSpc>
-              <a:buNone/>
-            </a:pPr>
-            <a:r>
-              <a:rPr lang="en-US" sz="1100" dirty="0">
-                <a:solidFill>
-                  <a:srgbClr val="5B6B7A"/>
-                </a:solidFill>
-                <a:latin typeface="Calibri" pitchFamily="34" charset="0"/>
-                <a:ea typeface="Calibri" pitchFamily="34" charset="-122"/>
-                <a:cs typeface="Calibri" pitchFamily="34" charset="-120"/>
-              </a:rPr>
-              <a:t>Títulos publicados entre 2014 y 2024</a:t>
-            </a:r>
-            <a:endParaRPr lang="en-US" sz="1100" dirty="0"/>
-          </a:p>
-        </p:txBody>
-      </p:sp>
-      <p:sp>
-        <p:nvSpPr>
-          <p:cNvPr id="25" name="Shape 18"/>
-          <p:cNvSpPr/>
-          <p:nvPr/>
-        </p:nvSpPr>
-        <p:spPr>
-          <a:xfrm>
-            <a:off x="4352544" y="4434840"/>
-            <a:ext cx="3483864" cy="1325880"/>
-          </a:xfrm>
-          <a:prstGeom prst="roundRect">
-            <a:avLst>
-              <a:gd name="adj" fmla="val 5517"/>
-            </a:avLst>
-          </a:prstGeom>
-          <a:solidFill>
-            <a:srgbClr val="F4F6F9"/>
-          </a:solidFill>
-          <a:ln w="12700">
-            <a:solidFill>
-              <a:srgbClr val="E1E8EF"/>
-            </a:solidFill>
-            <a:prstDash val="solid"/>
-          </a:ln>
-        </p:spPr>
-      </p:sp>
-      <p:pic>
-        <p:nvPicPr>
-          <p:cNvPr id="26" name="Image 5" descr="preencoded.png"/>
-          <p:cNvPicPr>
-            <a:picLocks noChangeAspect="1"/>
-          </p:cNvPicPr>
-          <p:nvPr/>
-        </p:nvPicPr>
-        <p:blipFill>
-          <a:blip r:embed="rId8"/>
-          <a:stretch>
-            <a:fillRect/>
-          </a:stretch>
-        </p:blipFill>
-        <p:spPr>
-          <a:xfrm>
-            <a:off x="4581144" y="4663440"/>
+            <a:off x="6871716" y="4658868"/>
             <a:ext cx="411480" cy="411480"/>
           </a:xfrm>
           <a:prstGeom prst="rect">
@@ -2423,7 +2350,7 @@
         </p:nvSpPr>
         <p:spPr>
           <a:xfrm>
-            <a:off x="4581144" y="5093208"/>
+            <a:off x="6871716" y="5088636"/>
             <a:ext cx="3026664" cy="274320"/>
           </a:xfrm>
           <a:prstGeom prst="rect">
@@ -2462,7 +2389,7 @@
         </p:nvSpPr>
         <p:spPr>
           <a:xfrm>
-            <a:off x="4581144" y="5367528"/>
+            <a:off x="6871716" y="5362956"/>
             <a:ext cx="3026664" cy="320040"/>
           </a:xfrm>
           <a:prstGeom prst="rect">
@@ -3863,6 +3790,17 @@
               <a:buNone/>
             </a:pPr>
             <a:r>
+              <a:rPr lang="en-US" sz="1250" b="1" dirty="0" err="1">
+                <a:solidFill>
+                  <a:srgbClr val="1B2838"/>
+                </a:solidFill>
+                <a:latin typeface="Calibri" pitchFamily="34" charset="0"/>
+                <a:ea typeface="Calibri" pitchFamily="34" charset="-122"/>
+                <a:cs typeface="Calibri" pitchFamily="34" charset="-120"/>
+              </a:rPr>
+              <a:t>Principales</a:t>
+            </a:r>
+            <a:r>
               <a:rPr lang="en-US" sz="1250" b="1" dirty="0">
                 <a:solidFill>
                   <a:srgbClr val="1B2838"/>
@@ -3871,7 +3809,18 @@
                 <a:ea typeface="Calibri" pitchFamily="34" charset="-122"/>
                 <a:cs typeface="Calibri" pitchFamily="34" charset="-120"/>
               </a:rPr>
-              <a:t>Variables:  </a:t>
+              <a:t> variables:  </a:t>
+            </a:r>
+            <a:r>
+              <a:rPr lang="en-US" sz="1250" dirty="0" err="1">
+                <a:solidFill>
+                  <a:srgbClr val="5B6B7A"/>
+                </a:solidFill>
+                <a:latin typeface="Calibri" pitchFamily="34" charset="0"/>
+                <a:ea typeface="Calibri" pitchFamily="34" charset="-122"/>
+                <a:cs typeface="Calibri" pitchFamily="34" charset="-120"/>
+              </a:rPr>
+              <a:t>Fecha</a:t>
             </a:r>
             <a:r>
               <a:rPr lang="en-US" sz="1250" dirty="0">
@@ -3882,7 +3831,183 @@
                 <a:ea typeface="Calibri" pitchFamily="34" charset="-122"/>
                 <a:cs typeface="Calibri" pitchFamily="34" charset="-120"/>
               </a:rPr>
-              <a:t>Numéricas, categóricas, temporales y booleanas</a:t>
+              <a:t>, </a:t>
+            </a:r>
+            <a:r>
+              <a:rPr lang="en-US" sz="1250" dirty="0" err="1">
+                <a:solidFill>
+                  <a:srgbClr val="5B6B7A"/>
+                </a:solidFill>
+                <a:latin typeface="Calibri" pitchFamily="34" charset="0"/>
+                <a:ea typeface="Calibri" pitchFamily="34" charset="-122"/>
+                <a:cs typeface="Calibri" pitchFamily="34" charset="-120"/>
+              </a:rPr>
+              <a:t>precio</a:t>
+            </a:r>
+            <a:r>
+              <a:rPr lang="en-US" sz="1250" dirty="0">
+                <a:solidFill>
+                  <a:srgbClr val="5B6B7A"/>
+                </a:solidFill>
+                <a:latin typeface="Calibri" pitchFamily="34" charset="0"/>
+                <a:ea typeface="Calibri" pitchFamily="34" charset="-122"/>
+                <a:cs typeface="Calibri" pitchFamily="34" charset="-120"/>
+              </a:rPr>
+              <a:t>, </a:t>
+            </a:r>
+            <a:r>
+              <a:rPr lang="en-US" sz="1250" dirty="0" err="1">
+                <a:solidFill>
+                  <a:srgbClr val="5B6B7A"/>
+                </a:solidFill>
+                <a:latin typeface="Calibri" pitchFamily="34" charset="0"/>
+                <a:ea typeface="Calibri" pitchFamily="34" charset="-122"/>
+                <a:cs typeface="Calibri" pitchFamily="34" charset="-120"/>
+              </a:rPr>
+              <a:t>género</a:t>
+            </a:r>
+            <a:r>
+              <a:rPr lang="en-US" sz="1250" dirty="0">
+                <a:solidFill>
+                  <a:srgbClr val="5B6B7A"/>
+                </a:solidFill>
+                <a:latin typeface="Calibri" pitchFamily="34" charset="0"/>
+                <a:ea typeface="Calibri" pitchFamily="34" charset="-122"/>
+                <a:cs typeface="Calibri" pitchFamily="34" charset="-120"/>
+              </a:rPr>
+              <a:t>, </a:t>
+            </a:r>
+            <a:r>
+              <a:rPr lang="en-US" sz="1250" dirty="0" err="1">
+                <a:solidFill>
+                  <a:srgbClr val="5B6B7A"/>
+                </a:solidFill>
+                <a:latin typeface="Calibri" pitchFamily="34" charset="0"/>
+                <a:ea typeface="Calibri" pitchFamily="34" charset="-122"/>
+                <a:cs typeface="Calibri" pitchFamily="34" charset="-120"/>
+              </a:rPr>
+              <a:t>idiomas</a:t>
+            </a:r>
+            <a:r>
+              <a:rPr lang="en-US" sz="1250" dirty="0">
+                <a:solidFill>
+                  <a:srgbClr val="5B6B7A"/>
+                </a:solidFill>
+                <a:latin typeface="Calibri" pitchFamily="34" charset="0"/>
+                <a:ea typeface="Calibri" pitchFamily="34" charset="-122"/>
+                <a:cs typeface="Calibri" pitchFamily="34" charset="-120"/>
+              </a:rPr>
+              <a:t>, reviews, </a:t>
+            </a:r>
+            <a:r>
+              <a:rPr lang="en-US" sz="1250" dirty="0" err="1">
+                <a:solidFill>
+                  <a:srgbClr val="5B6B7A"/>
+                </a:solidFill>
+                <a:latin typeface="Calibri" pitchFamily="34" charset="0"/>
+                <a:ea typeface="Calibri" pitchFamily="34" charset="-122"/>
+                <a:cs typeface="Calibri" pitchFamily="34" charset="-120"/>
+              </a:rPr>
+              <a:t>tiempo</a:t>
+            </a:r>
+            <a:r>
+              <a:rPr lang="en-US" sz="1250" dirty="0">
+                <a:solidFill>
+                  <a:srgbClr val="5B6B7A"/>
+                </a:solidFill>
+                <a:latin typeface="Calibri" pitchFamily="34" charset="0"/>
+                <a:ea typeface="Calibri" pitchFamily="34" charset="-122"/>
+                <a:cs typeface="Calibri" pitchFamily="34" charset="-120"/>
+              </a:rPr>
+              <a:t> de </a:t>
+            </a:r>
+            <a:r>
+              <a:rPr lang="en-US" sz="1250" dirty="0" err="1">
+                <a:solidFill>
+                  <a:srgbClr val="5B6B7A"/>
+                </a:solidFill>
+                <a:latin typeface="Calibri" pitchFamily="34" charset="0"/>
+                <a:ea typeface="Calibri" pitchFamily="34" charset="-122"/>
+                <a:cs typeface="Calibri" pitchFamily="34" charset="-120"/>
+              </a:rPr>
+              <a:t>juego</a:t>
+            </a:r>
+            <a:r>
+              <a:rPr lang="en-US" sz="1250" dirty="0">
+                <a:solidFill>
+                  <a:srgbClr val="5B6B7A"/>
+                </a:solidFill>
+                <a:latin typeface="Calibri" pitchFamily="34" charset="0"/>
+                <a:ea typeface="Calibri" pitchFamily="34" charset="-122"/>
+                <a:cs typeface="Calibri" pitchFamily="34" charset="-120"/>
+              </a:rPr>
+              <a:t> </a:t>
+            </a:r>
+            <a:r>
+              <a:rPr lang="en-US" sz="1250" dirty="0" err="1">
+                <a:solidFill>
+                  <a:srgbClr val="5B6B7A"/>
+                </a:solidFill>
+                <a:latin typeface="Calibri" pitchFamily="34" charset="0"/>
+                <a:ea typeface="Calibri" pitchFamily="34" charset="-122"/>
+                <a:cs typeface="Calibri" pitchFamily="34" charset="-120"/>
+              </a:rPr>
+              <a:t>promedio</a:t>
+            </a:r>
+            <a:r>
+              <a:rPr lang="en-US" sz="1250" dirty="0">
+                <a:solidFill>
+                  <a:srgbClr val="5B6B7A"/>
+                </a:solidFill>
+                <a:latin typeface="Calibri" pitchFamily="34" charset="0"/>
+                <a:ea typeface="Calibri" pitchFamily="34" charset="-122"/>
+                <a:cs typeface="Calibri" pitchFamily="34" charset="-120"/>
+              </a:rPr>
+              <a:t>, </a:t>
+            </a:r>
+            <a:r>
+              <a:rPr lang="en-US" sz="1250" dirty="0" err="1">
+                <a:solidFill>
+                  <a:srgbClr val="5B6B7A"/>
+                </a:solidFill>
+                <a:latin typeface="Calibri" pitchFamily="34" charset="0"/>
+                <a:ea typeface="Calibri" pitchFamily="34" charset="-122"/>
+                <a:cs typeface="Calibri" pitchFamily="34" charset="-120"/>
+              </a:rPr>
+              <a:t>sistema</a:t>
+            </a:r>
+            <a:r>
+              <a:rPr lang="en-US" sz="1250" dirty="0">
+                <a:solidFill>
+                  <a:srgbClr val="5B6B7A"/>
+                </a:solidFill>
+                <a:latin typeface="Calibri" pitchFamily="34" charset="0"/>
+                <a:ea typeface="Calibri" pitchFamily="34" charset="-122"/>
+                <a:cs typeface="Calibri" pitchFamily="34" charset="-120"/>
+              </a:rPr>
+              <a:t> </a:t>
+            </a:r>
+            <a:r>
+              <a:rPr lang="en-US" sz="1250" dirty="0" err="1">
+                <a:solidFill>
+                  <a:srgbClr val="5B6B7A"/>
+                </a:solidFill>
+                <a:latin typeface="Calibri" pitchFamily="34" charset="0"/>
+                <a:ea typeface="Calibri" pitchFamily="34" charset="-122"/>
+                <a:cs typeface="Calibri" pitchFamily="34" charset="-120"/>
+              </a:rPr>
+              <a:t>operativo</a:t>
+            </a:r>
+            <a:r>
+              <a:rPr lang="en-US" sz="1250" dirty="0">
+                <a:solidFill>
+                  <a:srgbClr val="5B6B7A"/>
+                </a:solidFill>
+                <a:latin typeface="Calibri" pitchFamily="34" charset="0"/>
+                <a:ea typeface="Calibri" pitchFamily="34" charset="-122"/>
+                <a:cs typeface="Calibri" pitchFamily="34" charset="-120"/>
+              </a:rPr>
+              <a:t>, etc.</a:t>
             </a:r>
             <a:endParaRPr lang="en-US" sz="1250" dirty="0"/>
           </a:p>
@@ -3948,7 +4073,40 @@
                 <a:ea typeface="Calibri" pitchFamily="34" charset="-122"/>
                 <a:cs typeface="Calibri" pitchFamily="34" charset="-120"/>
               </a:rPr>
-              <a:t>Licencia:  </a:t>
+              <a:t>Unidad de </a:t>
+            </a:r>
+            <a:r>
+              <a:rPr lang="en-US" sz="1250" b="1" dirty="0" err="1">
+                <a:solidFill>
+                  <a:srgbClr val="1B2838"/>
+                </a:solidFill>
+                <a:latin typeface="Calibri" pitchFamily="34" charset="0"/>
+                <a:ea typeface="Calibri" pitchFamily="34" charset="-122"/>
+                <a:cs typeface="Calibri" pitchFamily="34" charset="-120"/>
+              </a:rPr>
+              <a:t>observación</a:t>
+            </a:r>
+            <a:r>
+              <a:rPr lang="en-US" sz="1250" b="1" dirty="0">
+                <a:solidFill>
+                  <a:srgbClr val="1B2838"/>
+                </a:solidFill>
+                <a:latin typeface="Calibri" pitchFamily="34" charset="0"/>
+                <a:ea typeface="Calibri" pitchFamily="34" charset="-122"/>
+                <a:cs typeface="Calibri" pitchFamily="34" charset="-120"/>
+              </a:rPr>
+              <a:t>:  </a:t>
+            </a:r>
+            <a:r>
+              <a:rPr lang="en-US" sz="1250" dirty="0" err="1">
+                <a:solidFill>
+                  <a:srgbClr val="5B6B7A"/>
+                </a:solidFill>
+                <a:latin typeface="Calibri" pitchFamily="34" charset="0"/>
+                <a:ea typeface="Calibri" pitchFamily="34" charset="-122"/>
+                <a:cs typeface="Calibri" pitchFamily="34" charset="-120"/>
+              </a:rPr>
+              <a:t>Juego</a:t>
             </a:r>
             <a:r>
               <a:rPr lang="en-US" sz="1250" dirty="0">
@@ -3959,7 +4117,73 @@
                 <a:ea typeface="Calibri" pitchFamily="34" charset="-122"/>
                 <a:cs typeface="Calibri" pitchFamily="34" charset="-120"/>
               </a:rPr>
-              <a:t>Código del scraper bajo licencia MIT</a:t>
+              <a:t> individual, </a:t>
+            </a:r>
+            <a:r>
+              <a:rPr lang="en-US" sz="1250" dirty="0" err="1">
+                <a:solidFill>
+                  <a:srgbClr val="5B6B7A"/>
+                </a:solidFill>
+                <a:latin typeface="Calibri" pitchFamily="34" charset="0"/>
+                <a:ea typeface="Calibri" pitchFamily="34" charset="-122"/>
+                <a:cs typeface="Calibri" pitchFamily="34" charset="-120"/>
+              </a:rPr>
+              <a:t>diferenciado</a:t>
+            </a:r>
+            <a:r>
+              <a:rPr lang="en-US" sz="1250" dirty="0">
+                <a:solidFill>
+                  <a:srgbClr val="5B6B7A"/>
+                </a:solidFill>
+                <a:latin typeface="Calibri" pitchFamily="34" charset="0"/>
+                <a:ea typeface="Calibri" pitchFamily="34" charset="-122"/>
+                <a:cs typeface="Calibri" pitchFamily="34" charset="-120"/>
+              </a:rPr>
+              <a:t> </a:t>
+            </a:r>
+            <a:r>
+              <a:rPr lang="en-US" sz="1250" dirty="0" err="1">
+                <a:solidFill>
+                  <a:srgbClr val="5B6B7A"/>
+                </a:solidFill>
+                <a:latin typeface="Calibri" pitchFamily="34" charset="0"/>
+                <a:ea typeface="Calibri" pitchFamily="34" charset="-122"/>
+                <a:cs typeface="Calibri" pitchFamily="34" charset="-120"/>
+              </a:rPr>
+              <a:t>por</a:t>
+            </a:r>
+            <a:r>
+              <a:rPr lang="en-US" sz="1250" dirty="0">
+                <a:solidFill>
+                  <a:srgbClr val="5B6B7A"/>
+                </a:solidFill>
+                <a:latin typeface="Calibri" pitchFamily="34" charset="0"/>
+                <a:ea typeface="Calibri" pitchFamily="34" charset="-122"/>
+                <a:cs typeface="Calibri" pitchFamily="34" charset="-120"/>
+              </a:rPr>
+              <a:t> </a:t>
+            </a:r>
+            <a:r>
+              <a:rPr lang="en-US" sz="1250" dirty="0" err="1">
+                <a:solidFill>
+                  <a:srgbClr val="5B6B7A"/>
+                </a:solidFill>
+                <a:latin typeface="Calibri" pitchFamily="34" charset="0"/>
+                <a:ea typeface="Calibri" pitchFamily="34" charset="-122"/>
+                <a:cs typeface="Calibri" pitchFamily="34" charset="-120"/>
+              </a:rPr>
+              <a:t>AppID</a:t>
+            </a:r>
+            <a:r>
+              <a:rPr lang="en-US" sz="1250" dirty="0">
+                <a:solidFill>
+                  <a:srgbClr val="5B6B7A"/>
+                </a:solidFill>
+                <a:latin typeface="Calibri" pitchFamily="34" charset="0"/>
+                <a:ea typeface="Calibri" pitchFamily="34" charset="-122"/>
+                <a:cs typeface="Calibri" pitchFamily="34" charset="-120"/>
+              </a:rPr>
+              <a:t>.</a:t>
             </a:r>
             <a:endParaRPr lang="en-US" sz="1250" dirty="0"/>
           </a:p>
@@ -4088,7 +4312,7 @@
           <p:nvPr>
             <p:extLst>
               <p:ext uri="{D42A27DB-BD31-4B8C-83A1-F6EECF244321}">
-                <p14:modId xmlns:p14="http://schemas.microsoft.com/office/powerpoint/2010/main" val="1579011935"/>
+                <p14:modId xmlns:p14="http://schemas.microsoft.com/office/powerpoint/2010/main" val="211731367"/>
               </p:ext>
             </p:extLst>
           </p:nvPr>
@@ -4195,7 +4419,7 @@
                         <a:buNone/>
                       </a:pPr>
                       <a:r>
-                        <a:rPr lang="en-US" sz="1200" b="1" dirty="0">
+                        <a:rPr lang="en-US" sz="1200" b="1" dirty="0" err="1">
                           <a:solidFill>
                             <a:srgbClr val="FFFFFF"/>
                           </a:solidFill>
@@ -4203,7 +4427,7 @@
                           <a:ea typeface="Calibri" pitchFamily="34" charset="-122"/>
                           <a:cs typeface="Calibri" pitchFamily="34" charset="-120"/>
                         </a:rPr>
-                        <a:t>Ejemplo (ilustrativo)</a:t>
+                        <a:t>Ejemplo</a:t>
                       </a:r>
                       <a:endParaRPr lang="en-US" sz="1200" dirty="0">
                         <a:latin typeface="Calibri" charset="0"/>
@@ -5367,7 +5591,124 @@
         </p:nvSpPr>
         <p:spPr>
           <a:xfrm>
-            <a:off x="1280160" y="1874520"/>
+            <a:off x="1280160" y="1901952"/>
+            <a:ext cx="4480560" cy="777240"/>
+          </a:xfrm>
+          <a:prstGeom prst="rect">
+            <a:avLst/>
+          </a:prstGeom>
+          <a:noFill/>
+          <a:ln/>
+        </p:spPr>
+        <p:txBody>
+          <a:bodyPr wrap="square" lIns="0" tIns="0" rIns="0" bIns="0" rtlCol="0" anchor="ctr"/>
+          <a:lstStyle/>
+          <a:p>
+            <a:r>
+              <a:rPr lang="en-US" sz="1250" dirty="0">
+                <a:solidFill>
+                  <a:srgbClr val="1B2838"/>
+                </a:solidFill>
+                <a:latin typeface="Calibri" pitchFamily="34" charset="0"/>
+                <a:ea typeface="Calibri" pitchFamily="34" charset="-122"/>
+                <a:cs typeface="Calibri" pitchFamily="34" charset="-120"/>
+              </a:rPr>
+              <a:t>Variables: género, precio, idiomas, sistema operativo, reviews, DLC, </a:t>
+            </a:r>
+            <a:r>
+              <a:rPr lang="en-US" sz="1250" dirty="0" err="1">
+                <a:solidFill>
+                  <a:srgbClr val="1B2838"/>
+                </a:solidFill>
+                <a:latin typeface="Calibri" pitchFamily="34" charset="0"/>
+                <a:ea typeface="Calibri" pitchFamily="34" charset="-122"/>
+                <a:cs typeface="Calibri" pitchFamily="34" charset="-120"/>
+              </a:rPr>
+              <a:t>fecha</a:t>
+            </a:r>
+            <a:r>
+              <a:rPr lang="en-US" sz="1250" dirty="0">
+                <a:solidFill>
+                  <a:srgbClr val="1B2838"/>
+                </a:solidFill>
+                <a:latin typeface="Calibri" pitchFamily="34" charset="0"/>
+                <a:ea typeface="Calibri" pitchFamily="34" charset="-122"/>
+                <a:cs typeface="Calibri" pitchFamily="34" charset="-120"/>
+              </a:rPr>
+              <a:t>, etc.</a:t>
+            </a:r>
+            <a:endParaRPr lang="en-US" sz="1250" dirty="0"/>
+          </a:p>
+        </p:txBody>
+      </p:sp>
+      <p:sp>
+        <p:nvSpPr>
+          <p:cNvPr id="8" name="Shape 6"/>
+          <p:cNvSpPr/>
+          <p:nvPr/>
+        </p:nvSpPr>
+        <p:spPr>
+          <a:xfrm>
+            <a:off x="548640" y="2880360"/>
+            <a:ext cx="548640" cy="548640"/>
+          </a:xfrm>
+          <a:prstGeom prst="ellipse">
+            <a:avLst/>
+          </a:prstGeom>
+          <a:solidFill>
+            <a:srgbClr val="1C6EA4"/>
+          </a:solidFill>
+          <a:ln/>
+        </p:spPr>
+      </p:sp>
+      <p:sp>
+        <p:nvSpPr>
+          <p:cNvPr id="9" name="Text 7"/>
+          <p:cNvSpPr txBox="1"/>
+          <p:nvPr/>
+        </p:nvSpPr>
+        <p:spPr>
+          <a:xfrm>
+            <a:off x="548640" y="2907792"/>
+            <a:ext cx="548640" cy="475488"/>
+          </a:xfrm>
+          <a:prstGeom prst="rect">
+            <a:avLst/>
+          </a:prstGeom>
+          <a:noFill/>
+          <a:ln/>
+        </p:spPr>
+        <p:txBody>
+          <a:bodyPr wrap="square" lIns="0" tIns="0" rIns="0" bIns="0" rtlCol="0" anchor="ctr"/>
+          <a:lstStyle/>
+          <a:p>
+            <a:pPr marL="0" indent="0" algn="ctr">
+              <a:buNone/>
+            </a:pPr>
+            <a:r>
+              <a:rPr lang="en-US" sz="2200" b="1" dirty="0">
+                <a:solidFill>
+                  <a:srgbClr val="FFFFFF"/>
+                </a:solidFill>
+                <a:latin typeface="Cambria" pitchFamily="34" charset="0"/>
+                <a:ea typeface="Cambria" pitchFamily="34" charset="-122"/>
+                <a:cs typeface="Cambria" pitchFamily="34" charset="-120"/>
+              </a:rPr>
+              <a:t>Y</a:t>
+            </a:r>
+            <a:endParaRPr lang="en-US" sz="2200" dirty="0"/>
+          </a:p>
+        </p:txBody>
+      </p:sp>
+      <p:sp>
+        <p:nvSpPr>
+          <p:cNvPr id="10" name="Text 8"/>
+          <p:cNvSpPr txBox="1"/>
+          <p:nvPr/>
+        </p:nvSpPr>
+        <p:spPr>
+          <a:xfrm>
+            <a:off x="1280160" y="2880360"/>
             <a:ext cx="4480560" cy="777240"/>
           </a:xfrm>
           <a:prstGeom prst="rect">
@@ -5395,98 +5736,19 @@
                 <a:ea typeface="Calibri" pitchFamily="34" charset="-122"/>
                 <a:cs typeface="Calibri" pitchFamily="34" charset="-120"/>
               </a:rPr>
-              <a:t>Columnas: género, precio, idiomas, sistema operativo, comunidad, DLC y fecha</a:t>
-            </a:r>
-            <a:endParaRPr lang="en-US" sz="1250" dirty="0"/>
-          </a:p>
-        </p:txBody>
-      </p:sp>
-      <p:sp>
-        <p:nvSpPr>
-          <p:cNvPr id="8" name="Shape 6"/>
-          <p:cNvSpPr/>
-          <p:nvPr/>
-        </p:nvSpPr>
-        <p:spPr>
-          <a:xfrm>
-            <a:off x="548640" y="2880360"/>
-            <a:ext cx="548640" cy="548640"/>
-          </a:xfrm>
-          <a:prstGeom prst="ellipse">
-            <a:avLst/>
-          </a:prstGeom>
-          <a:solidFill>
-            <a:srgbClr val="1C6EA4"/>
-          </a:solidFill>
-          <a:ln/>
-        </p:spPr>
-      </p:sp>
-      <p:sp>
-        <p:nvSpPr>
-          <p:cNvPr id="9" name="Text 7"/>
-          <p:cNvSpPr txBox="1"/>
-          <p:nvPr/>
-        </p:nvSpPr>
-        <p:spPr>
-          <a:xfrm>
-            <a:off x="548640" y="2907792"/>
-            <a:ext cx="548640" cy="475488"/>
-          </a:xfrm>
-          <a:prstGeom prst="rect">
-            <a:avLst/>
-          </a:prstGeom>
-          <a:noFill/>
-          <a:ln/>
-        </p:spPr>
-        <p:txBody>
-          <a:bodyPr wrap="square" lIns="0" tIns="0" rIns="0" bIns="0" rtlCol="0" anchor="ctr"/>
-          <a:lstStyle/>
-          <a:p>
-            <a:pPr marL="0" indent="0" algn="ctr">
-              <a:buNone/>
-            </a:pPr>
-            <a:r>
-              <a:rPr lang="en-US" sz="2200" b="1" dirty="0">
-                <a:solidFill>
-                  <a:srgbClr val="FFFFFF"/>
-                </a:solidFill>
-                <a:latin typeface="Cambria" pitchFamily="34" charset="0"/>
-                <a:ea typeface="Cambria" pitchFamily="34" charset="-122"/>
-                <a:cs typeface="Cambria" pitchFamily="34" charset="-120"/>
-              </a:rPr>
-              <a:t>Y</a:t>
-            </a:r>
-            <a:endParaRPr lang="en-US" sz="2200" dirty="0"/>
-          </a:p>
-        </p:txBody>
-      </p:sp>
-      <p:sp>
-        <p:nvSpPr>
-          <p:cNvPr id="10" name="Text 8"/>
-          <p:cNvSpPr txBox="1"/>
-          <p:nvPr/>
-        </p:nvSpPr>
-        <p:spPr>
-          <a:xfrm>
-            <a:off x="1280160" y="2880360"/>
-            <a:ext cx="4480560" cy="777240"/>
-          </a:xfrm>
-          <a:prstGeom prst="rect">
-            <a:avLst/>
-          </a:prstGeom>
-          <a:noFill/>
-          <a:ln/>
-        </p:spPr>
-        <p:txBody>
-          <a:bodyPr wrap="square" lIns="0" tIns="0" rIns="0" bIns="0" rtlCol="0" anchor="ctr"/>
-          <a:lstStyle/>
-          <a:p>
-            <a:pPr marL="0" indent="0">
-              <a:lnSpc>
-                <a:spcPct val="100000"/>
-              </a:lnSpc>
-              <a:buNone/>
-            </a:pPr>
+              <a:t>Fenómeno: proporción de </a:t>
+            </a:r>
+            <a:r>
+              <a:rPr lang="en-US" sz="1250" dirty="0" err="1">
+                <a:solidFill>
+                  <a:srgbClr val="1B2838"/>
+                </a:solidFill>
+                <a:latin typeface="Calibri" pitchFamily="34" charset="0"/>
+                <a:ea typeface="Calibri" pitchFamily="34" charset="-122"/>
+                <a:cs typeface="Calibri" pitchFamily="34" charset="-120"/>
+              </a:rPr>
+              <a:t>reseñas</a:t>
+            </a:r>
             <a:r>
               <a:rPr lang="en-US" sz="1250" dirty="0">
                 <a:solidFill>
@@ -5496,7 +5758,117 @@
                 <a:ea typeface="Calibri" pitchFamily="34" charset="-122"/>
                 <a:cs typeface="Calibri" pitchFamily="34" charset="-120"/>
               </a:rPr>
-              <a:t>Fenómeno: proporción de reseñas positivas, tiempo de juego y volumen de reseñas</a:t>
+              <a:t> </a:t>
+            </a:r>
+            <a:r>
+              <a:rPr lang="en-US" sz="1250" dirty="0" err="1">
+                <a:solidFill>
+                  <a:srgbClr val="1B2838"/>
+                </a:solidFill>
+                <a:latin typeface="Calibri" pitchFamily="34" charset="0"/>
+                <a:ea typeface="Calibri" pitchFamily="34" charset="-122"/>
+                <a:cs typeface="Calibri" pitchFamily="34" charset="-120"/>
+              </a:rPr>
+              <a:t>positivas</a:t>
+            </a:r>
+            <a:r>
+              <a:rPr lang="en-US" sz="1250" dirty="0">
+                <a:solidFill>
+                  <a:srgbClr val="1B2838"/>
+                </a:solidFill>
+                <a:latin typeface="Calibri" pitchFamily="34" charset="0"/>
+                <a:ea typeface="Calibri" pitchFamily="34" charset="-122"/>
+                <a:cs typeface="Calibri" pitchFamily="34" charset="-120"/>
+              </a:rPr>
+              <a:t>/</a:t>
+            </a:r>
+            <a:r>
+              <a:rPr lang="en-US" sz="1250" dirty="0" err="1">
+                <a:solidFill>
+                  <a:srgbClr val="1B2838"/>
+                </a:solidFill>
+                <a:latin typeface="Calibri" pitchFamily="34" charset="0"/>
+                <a:ea typeface="Calibri" pitchFamily="34" charset="-122"/>
+                <a:cs typeface="Calibri" pitchFamily="34" charset="-120"/>
+              </a:rPr>
+              <a:t>negativas</a:t>
+            </a:r>
+            <a:r>
+              <a:rPr lang="en-US" sz="1250" dirty="0">
+                <a:solidFill>
+                  <a:srgbClr val="1B2838"/>
+                </a:solidFill>
+                <a:latin typeface="Calibri" pitchFamily="34" charset="0"/>
+                <a:ea typeface="Calibri" pitchFamily="34" charset="-122"/>
+                <a:cs typeface="Calibri" pitchFamily="34" charset="-120"/>
+              </a:rPr>
+              <a:t>, tiempo de </a:t>
+            </a:r>
+            <a:r>
+              <a:rPr lang="en-US" sz="1250" dirty="0" err="1">
+                <a:solidFill>
+                  <a:srgbClr val="1B2838"/>
+                </a:solidFill>
+                <a:latin typeface="Calibri" pitchFamily="34" charset="0"/>
+                <a:ea typeface="Calibri" pitchFamily="34" charset="-122"/>
+                <a:cs typeface="Calibri" pitchFamily="34" charset="-120"/>
+              </a:rPr>
+              <a:t>juego</a:t>
+            </a:r>
+            <a:r>
+              <a:rPr lang="en-US" sz="1250" dirty="0">
+                <a:solidFill>
+                  <a:srgbClr val="1B2838"/>
+                </a:solidFill>
+                <a:latin typeface="Calibri" pitchFamily="34" charset="0"/>
+                <a:ea typeface="Calibri" pitchFamily="34" charset="-122"/>
+                <a:cs typeface="Calibri" pitchFamily="34" charset="-120"/>
+              </a:rPr>
+              <a:t> </a:t>
+            </a:r>
+            <a:r>
+              <a:rPr lang="en-US" sz="1250" dirty="0" err="1">
+                <a:solidFill>
+                  <a:srgbClr val="1B2838"/>
+                </a:solidFill>
+                <a:latin typeface="Calibri" pitchFamily="34" charset="0"/>
+                <a:ea typeface="Calibri" pitchFamily="34" charset="-122"/>
+                <a:cs typeface="Calibri" pitchFamily="34" charset="-120"/>
+              </a:rPr>
+              <a:t>promedio</a:t>
+            </a:r>
+            <a:r>
+              <a:rPr lang="en-US" sz="1250" dirty="0">
+                <a:solidFill>
+                  <a:srgbClr val="1B2838"/>
+                </a:solidFill>
+                <a:latin typeface="Calibri" pitchFamily="34" charset="0"/>
+                <a:ea typeface="Calibri" pitchFamily="34" charset="-122"/>
+                <a:cs typeface="Calibri" pitchFamily="34" charset="-120"/>
+              </a:rPr>
+              <a:t> y volumen de </a:t>
+            </a:r>
+            <a:r>
+              <a:rPr lang="en-US" sz="1250" dirty="0" err="1">
+                <a:solidFill>
+                  <a:srgbClr val="1B2838"/>
+                </a:solidFill>
+                <a:latin typeface="Calibri" pitchFamily="34" charset="0"/>
+                <a:ea typeface="Calibri" pitchFamily="34" charset="-122"/>
+                <a:cs typeface="Calibri" pitchFamily="34" charset="-120"/>
+              </a:rPr>
+              <a:t>reseñas</a:t>
+            </a:r>
+            <a:r>
+              <a:rPr lang="en-US" sz="1250" dirty="0">
+                <a:solidFill>
+                  <a:srgbClr val="1B2838"/>
+                </a:solidFill>
+                <a:latin typeface="Calibri" pitchFamily="34" charset="0"/>
+                <a:ea typeface="Calibri" pitchFamily="34" charset="-122"/>
+                <a:cs typeface="Calibri" pitchFamily="34" charset="-120"/>
+              </a:rPr>
+              <a:t>.</a:t>
             </a:r>
             <a:endParaRPr lang="en-US" sz="1250" dirty="0"/>
           </a:p>
@@ -6478,7 +6850,7 @@
         </p:nvSpPr>
         <p:spPr>
           <a:xfrm>
-            <a:off x="6400800" y="1828800"/>
+            <a:off x="6309360" y="1179576"/>
             <a:ext cx="5239512" cy="320040"/>
           </a:xfrm>
           <a:prstGeom prst="rect">
@@ -6525,7 +6897,7 @@
         </p:blipFill>
         <p:spPr>
           <a:xfrm>
-            <a:off x="6400800" y="2304288"/>
+            <a:off x="6309360" y="1655064"/>
             <a:ext cx="292608" cy="292608"/>
           </a:xfrm>
           <a:prstGeom prst="rect">
@@ -6541,7 +6913,7 @@
         </p:nvSpPr>
         <p:spPr>
           <a:xfrm>
-            <a:off x="6812280" y="2286000"/>
+            <a:off x="6720840" y="1636776"/>
             <a:ext cx="4828032" cy="329184"/>
           </a:xfrm>
           <a:prstGeom prst="rect">
@@ -6588,7 +6960,7 @@
         </p:blipFill>
         <p:spPr>
           <a:xfrm>
-            <a:off x="6400800" y="2761488"/>
+            <a:off x="6309360" y="2112264"/>
             <a:ext cx="292608" cy="292608"/>
           </a:xfrm>
           <a:prstGeom prst="rect">
@@ -6604,7 +6976,7 @@
         </p:nvSpPr>
         <p:spPr>
           <a:xfrm>
-            <a:off x="6812280" y="2743200"/>
+            <a:off x="6720840" y="2093976"/>
             <a:ext cx="4828032" cy="329184"/>
           </a:xfrm>
           <a:prstGeom prst="rect">
@@ -6651,7 +7023,7 @@
         </p:blipFill>
         <p:spPr>
           <a:xfrm>
-            <a:off x="6400800" y="3218688"/>
+            <a:off x="6309360" y="2569464"/>
             <a:ext cx="292608" cy="292608"/>
           </a:xfrm>
           <a:prstGeom prst="rect">
@@ -6667,7 +7039,7 @@
         </p:nvSpPr>
         <p:spPr>
           <a:xfrm>
-            <a:off x="6812280" y="3200400"/>
+            <a:off x="6720840" y="2551176"/>
             <a:ext cx="4828032" cy="329184"/>
           </a:xfrm>
           <a:prstGeom prst="rect">
@@ -6714,7 +7086,7 @@
         </p:blipFill>
         <p:spPr>
           <a:xfrm>
-            <a:off x="6400800" y="3675888"/>
+            <a:off x="6309360" y="3026664"/>
             <a:ext cx="292608" cy="292608"/>
           </a:xfrm>
           <a:prstGeom prst="rect">
@@ -6730,7 +7102,7 @@
         </p:nvSpPr>
         <p:spPr>
           <a:xfrm>
-            <a:off x="6812280" y="3657600"/>
+            <a:off x="6720840" y="3008376"/>
             <a:ext cx="4828032" cy="329184"/>
           </a:xfrm>
           <a:prstGeom prst="rect">
@@ -6777,7 +7149,7 @@
         </p:blipFill>
         <p:spPr>
           <a:xfrm>
-            <a:off x="6400800" y="4133088"/>
+            <a:off x="6309360" y="3483864"/>
             <a:ext cx="292608" cy="292608"/>
           </a:xfrm>
           <a:prstGeom prst="rect">
@@ -6793,7 +7165,7 @@
         </p:nvSpPr>
         <p:spPr>
           <a:xfrm>
-            <a:off x="6812280" y="4114800"/>
+            <a:off x="6720840" y="3465576"/>
             <a:ext cx="4828032" cy="329184"/>
           </a:xfrm>
           <a:prstGeom prst="rect">
@@ -6852,6 +7224,36 @@
           </a:p>
         </p:txBody>
       </p:sp>
+      <p:pic>
+        <p:nvPicPr>
+          <p:cNvPr id="23" name="Picture 22" descr="A screenshot of a computer&#10;&#10;AI-generated content may be incorrect.">
+            <a:extLst>
+              <a:ext uri="{FF2B5EF4-FFF2-40B4-BE49-F238E27FC236}">
+                <a16:creationId xmlns:a16="http://schemas.microsoft.com/office/drawing/2014/main" id="{607E1E6D-BDAE-1108-067C-E4EF950C3D8C}"/>
+              </a:ext>
+            </a:extLst>
+          </p:cNvPr>
+          <p:cNvPicPr>
+            <a:picLocks noChangeAspect="1"/>
+          </p:cNvPicPr>
+          <p:nvPr/>
+        </p:nvPicPr>
+        <p:blipFill>
+          <a:blip r:embed="rId5"/>
+          <a:stretch>
+            <a:fillRect/>
+          </a:stretch>
+        </p:blipFill>
+        <p:spPr>
+          <a:xfrm>
+            <a:off x="6156962" y="3959352"/>
+            <a:ext cx="5922179" cy="2803892"/>
+          </a:xfrm>
+          <a:prstGeom prst="rect">
+            <a:avLst/>
+          </a:prstGeom>
+        </p:spPr>
+      </p:pic>
     </p:spTree>
   </p:cSld>
   <p:clrMapOvr>
